--- a/instructors/10_Reusable-analysis.pptx
+++ b/instructors/10_Reusable-analysis.pptx
@@ -217,7 +217,7 @@
           <a:p>
             <a:fld id="{585C48AE-4A1E-9A43-835F-510354165F99}" type="datetimeFigureOut">
               <a:rPr lang="en-GB" smtClean="0"/>
-              <a:t>02/04/2023</a:t>
+              <a:t>23/01/2025</a:t>
             </a:fld>
             <a:endParaRPr lang="en-GB" dirty="0"/>
           </a:p>
@@ -801,7 +801,7 @@
           <a:p>
             <a:fld id="{5913FB77-D8DB-4AB9-8EA5-EE8C3B57A5E1}" type="datetimeFigureOut">
               <a:rPr lang="en-GB" smtClean="0"/>
-              <a:t>02/04/2023</a:t>
+              <a:t>23/01/2025</a:t>
             </a:fld>
             <a:endParaRPr lang="en-GB" dirty="0"/>
           </a:p>
@@ -1001,7 +1001,7 @@
           <a:p>
             <a:fld id="{5913FB77-D8DB-4AB9-8EA5-EE8C3B57A5E1}" type="datetimeFigureOut">
               <a:rPr lang="en-GB" smtClean="0"/>
-              <a:t>02/04/2023</a:t>
+              <a:t>23/01/2025</a:t>
             </a:fld>
             <a:endParaRPr lang="en-GB" dirty="0"/>
           </a:p>
@@ -1211,7 +1211,7 @@
           <a:p>
             <a:fld id="{5913FB77-D8DB-4AB9-8EA5-EE8C3B57A5E1}" type="datetimeFigureOut">
               <a:rPr lang="en-GB" smtClean="0"/>
-              <a:t>02/04/2023</a:t>
+              <a:t>23/01/2025</a:t>
             </a:fld>
             <a:endParaRPr lang="en-GB" dirty="0"/>
           </a:p>
@@ -1411,7 +1411,7 @@
           <a:p>
             <a:fld id="{5913FB77-D8DB-4AB9-8EA5-EE8C3B57A5E1}" type="datetimeFigureOut">
               <a:rPr lang="en-GB" smtClean="0"/>
-              <a:t>02/04/2023</a:t>
+              <a:t>23/01/2025</a:t>
             </a:fld>
             <a:endParaRPr lang="en-GB" dirty="0"/>
           </a:p>
@@ -1687,7 +1687,7 @@
           <a:p>
             <a:fld id="{5913FB77-D8DB-4AB9-8EA5-EE8C3B57A5E1}" type="datetimeFigureOut">
               <a:rPr lang="en-GB" smtClean="0"/>
-              <a:t>02/04/2023</a:t>
+              <a:t>23/01/2025</a:t>
             </a:fld>
             <a:endParaRPr lang="en-GB" dirty="0"/>
           </a:p>
@@ -1955,7 +1955,7 @@
           <a:p>
             <a:fld id="{5913FB77-D8DB-4AB9-8EA5-EE8C3B57A5E1}" type="datetimeFigureOut">
               <a:rPr lang="en-GB" smtClean="0"/>
-              <a:t>02/04/2023</a:t>
+              <a:t>23/01/2025</a:t>
             </a:fld>
             <a:endParaRPr lang="en-GB" dirty="0"/>
           </a:p>
@@ -2370,7 +2370,7 @@
           <a:p>
             <a:fld id="{5913FB77-D8DB-4AB9-8EA5-EE8C3B57A5E1}" type="datetimeFigureOut">
               <a:rPr lang="en-GB" smtClean="0"/>
-              <a:t>02/04/2023</a:t>
+              <a:t>23/01/2025</a:t>
             </a:fld>
             <a:endParaRPr lang="en-GB" dirty="0"/>
           </a:p>
@@ -2512,7 +2512,7 @@
           <a:p>
             <a:fld id="{5913FB77-D8DB-4AB9-8EA5-EE8C3B57A5E1}" type="datetimeFigureOut">
               <a:rPr lang="en-GB" smtClean="0"/>
-              <a:t>02/04/2023</a:t>
+              <a:t>23/01/2025</a:t>
             </a:fld>
             <a:endParaRPr lang="en-GB" dirty="0"/>
           </a:p>
@@ -2625,7 +2625,7 @@
           <a:p>
             <a:fld id="{5913FB77-D8DB-4AB9-8EA5-EE8C3B57A5E1}" type="datetimeFigureOut">
               <a:rPr lang="en-GB" smtClean="0"/>
-              <a:t>02/04/2023</a:t>
+              <a:t>23/01/2025</a:t>
             </a:fld>
             <a:endParaRPr lang="en-GB" dirty="0"/>
           </a:p>
@@ -2938,7 +2938,7 @@
           <a:p>
             <a:fld id="{5913FB77-D8DB-4AB9-8EA5-EE8C3B57A5E1}" type="datetimeFigureOut">
               <a:rPr lang="en-GB" smtClean="0"/>
-              <a:t>02/04/2023</a:t>
+              <a:t>23/01/2025</a:t>
             </a:fld>
             <a:endParaRPr lang="en-GB" dirty="0"/>
           </a:p>
@@ -3227,7 +3227,7 @@
           <a:p>
             <a:fld id="{5913FB77-D8DB-4AB9-8EA5-EE8C3B57A5E1}" type="datetimeFigureOut">
               <a:rPr lang="en-GB" smtClean="0"/>
-              <a:t>02/04/2023</a:t>
+              <a:t>23/01/2025</a:t>
             </a:fld>
             <a:endParaRPr lang="en-GB" dirty="0"/>
           </a:p>
@@ -3470,7 +3470,7 @@
           <a:p>
             <a:fld id="{5913FB77-D8DB-4AB9-8EA5-EE8C3B57A5E1}" type="datetimeFigureOut">
               <a:rPr lang="en-GB" smtClean="0"/>
-              <a:t>02/04/2023</a:t>
+              <a:t>23/01/2025</a:t>
             </a:fld>
             <a:endParaRPr lang="en-GB" dirty="0"/>
           </a:p>
@@ -3930,15 +3930,7 @@
                   <a:srgbClr val="0070C0"/>
                 </a:solidFill>
               </a:rPr>
-              <a:t> </a:t>
-            </a:r>
-            <a:r>
-              <a:rPr lang="pl-PL" sz="4400" dirty="0" smtClean="0">
-                <a:solidFill>
-                  <a:srgbClr val="0070C0"/>
-                </a:solidFill>
-              </a:rPr>
-              <a:t>analysis</a:t>
+              <a:t> analysis</a:t>
             </a:r>
             <a:endParaRPr lang="en-GB" sz="4400" dirty="0">
               <a:solidFill>
@@ -4111,7 +4103,7 @@
                   <a:srgbClr val="0070C0"/>
                 </a:solidFill>
               </a:rPr>
-              <a:t> in notebook</a:t>
+              <a:t> in the notebook</a:t>
             </a:r>
           </a:p>
           <a:p>
@@ -4219,7 +4211,7 @@
                   <a:srgbClr val="0070C0"/>
                 </a:solidFill>
               </a:rPr>
-              <a:t>practise</a:t>
+              <a:t>practice</a:t>
             </a:r>
             <a:r>
               <a:rPr lang="pl-PL" sz="2800" dirty="0">
@@ -4243,7 +4235,7 @@
                   <a:srgbClr val="0070C0"/>
                 </a:solidFill>
               </a:rPr>
-              <a:t> </a:t>
+              <a:t>-</a:t>
             </a:r>
             <a:r>
               <a:rPr lang="pl-PL" sz="2800" dirty="0" err="1">
@@ -4479,7 +4471,7 @@
           <a:lstStyle/>
           <a:p>
             <a:r>
-              <a:rPr lang="en-GB" sz="2800" dirty="0" smtClean="0">
+              <a:rPr lang="en-GB" sz="2800" dirty="0">
                 <a:solidFill>
                   <a:srgbClr val="0070C0"/>
                 </a:solidFill>
@@ -4493,18 +4485,13 @@
               <a:buChar char="•"/>
             </a:pPr>
             <a:r>
-              <a:rPr lang="en-GB" sz="2800" dirty="0" smtClean="0">
-                <a:solidFill>
-                  <a:srgbClr val="0070C0"/>
-                </a:solidFill>
-              </a:rPr>
-              <a:t>We recommend installing anaconda (https://anaconda.org/)</a:t>
-            </a:r>
-            <a:endParaRPr lang="en-GB" sz="2800" dirty="0" smtClean="0">
-              <a:solidFill>
-                <a:srgbClr val="0070C0"/>
-              </a:solidFill>
-            </a:endParaRPr>
+              <a:rPr lang="en-GB" sz="2800" dirty="0">
+                <a:solidFill>
+                  <a:srgbClr val="0070C0"/>
+                </a:solidFill>
+              </a:rPr>
+              <a:t>We recommend installing Anaconda (https://anaconda.org/)</a:t>
+            </a:r>
           </a:p>
           <a:p>
             <a:pPr marL="457200" indent="-457200">
@@ -4512,7 +4499,7 @@
               <a:buChar char="•"/>
             </a:pPr>
             <a:r>
-              <a:rPr lang="en-GB" sz="2800" dirty="0" smtClean="0">
+              <a:rPr lang="en-GB" sz="2800" dirty="0">
                 <a:solidFill>
                   <a:srgbClr val="0070C0"/>
                 </a:solidFill>
@@ -4520,15 +4507,31 @@
               <a:t>And follow the</a:t>
             </a:r>
             <a:r>
-              <a:rPr lang="pl-PL" sz="2800" dirty="0" smtClean="0">
-                <a:solidFill>
-                  <a:srgbClr val="0070C0"/>
-                </a:solidFill>
-              </a:rPr>
-              <a:t> jupyter installation</a:t>
-            </a:r>
-            <a:r>
-              <a:rPr lang="en-GB" sz="2800" dirty="0" smtClean="0">
+              <a:rPr lang="pl-PL" sz="2800" dirty="0">
+                <a:solidFill>
+                  <a:srgbClr val="0070C0"/>
+                </a:solidFill>
+              </a:rPr>
+              <a:t> </a:t>
+            </a:r>
+            <a:r>
+              <a:rPr lang="pl-PL" sz="2800" dirty="0" err="1">
+                <a:solidFill>
+                  <a:srgbClr val="0070C0"/>
+                </a:solidFill>
+              </a:rPr>
+              <a:t>Jupyter</a:t>
+            </a:r>
+            <a:r>
+              <a:rPr lang="pl-PL" sz="2800" dirty="0">
+                <a:solidFill>
+                  <a:srgbClr val="0070C0"/>
+                </a:solidFill>
+              </a:rPr>
+              <a:t> installation</a:t>
+            </a:r>
+            <a:r>
+              <a:rPr lang="en-GB" sz="2800" dirty="0">
                 <a:solidFill>
                   <a:srgbClr val="0070C0"/>
                 </a:solidFill>
@@ -4549,7 +4552,7 @@
           </a:p>
           <a:p>
             <a:r>
-              <a:rPr lang="en-GB" sz="2800" dirty="0" err="1" smtClean="0">
+              <a:rPr lang="en-GB" sz="2800" dirty="0" err="1">
                 <a:solidFill>
                   <a:srgbClr val="0070C0"/>
                 </a:solidFill>
@@ -4557,7 +4560,7 @@
               <a:t>Jupyter</a:t>
             </a:r>
             <a:r>
-              <a:rPr lang="en-GB" sz="2800" dirty="0" smtClean="0">
+              <a:rPr lang="en-GB" sz="2800" dirty="0">
                 <a:solidFill>
                   <a:srgbClr val="0070C0"/>
                 </a:solidFill>
@@ -4684,15 +4687,7 @@
                   <a:srgbClr val="0070C0"/>
                 </a:solidFill>
               </a:rPr>
-              <a:t>Jupyter notebook </a:t>
-            </a:r>
-            <a:r>
-              <a:rPr lang="pl-PL" dirty="0" smtClean="0">
-                <a:solidFill>
-                  <a:srgbClr val="0070C0"/>
-                </a:solidFill>
-              </a:rPr>
-              <a:t>running</a:t>
+              <a:t>Jupyter notebook running</a:t>
             </a:r>
             <a:endParaRPr lang="en-GB" dirty="0">
               <a:solidFill>
@@ -4747,7 +4742,7 @@
           <p:nvPr/>
         </p:nvPicPr>
         <p:blipFill>
-          <a:blip r:embed="rId4"/>
+          <a:blip r:embed="rId3"/>
           <a:stretch>
             <a:fillRect/>
           </a:stretch>
@@ -4790,12 +4785,12 @@
           <a:graphicData uri="http://schemas.openxmlformats.org/presentationml/2006/ole">
             <mc:AlternateContent xmlns:mc="http://schemas.openxmlformats.org/markup-compatibility/2006">
               <mc:Choice xmlns:v="urn:schemas-microsoft-com:vml" Requires="v">
-                <p:oleObj spid="_x0000_s2070" name="Image" r:id="rId5" imgW="4926984" imgH="6171429" progId="Photoshop.Image.11">
+                <p:oleObj name="Image" r:id="rId4" imgW="4926984" imgH="6171429" progId="Photoshop.Image.11">
                   <p:embed/>
                 </p:oleObj>
               </mc:Choice>
               <mc:Fallback>
-                <p:oleObj name="Image" r:id="rId5" imgW="4926984" imgH="6171429" progId="Photoshop.Image.11">
+                <p:oleObj name="Image" r:id="rId4" imgW="4926984" imgH="6171429" progId="Photoshop.Image.11">
                   <p:embed/>
                   <p:pic>
                     <p:nvPicPr>
@@ -4812,7 +4807,7 @@
                       <p:nvPr/>
                     </p:nvPicPr>
                     <p:blipFill>
-                      <a:blip r:embed="rId6">
+                      <a:blip r:embed="rId5">
                         <a:extLst>
                           <a:ext uri="{28A0092B-C50C-407E-A947-70E740481C1C}">
                             <a14:useLocalDpi xmlns:a14="http://schemas.microsoft.com/office/drawing/2010/main" val="0"/>
@@ -4888,7 +4883,7 @@
           <p:nvPr/>
         </p:nvPicPr>
         <p:blipFill>
-          <a:blip r:embed="rId7" cstate="hqprint">
+          <a:blip r:embed="rId6" cstate="hqprint">
             <a:extLst>
               <a:ext uri="{28A0092B-C50C-407E-A947-70E740481C1C}">
                 <a14:useLocalDpi xmlns:a14="http://schemas.microsoft.com/office/drawing/2010/main" val="0"/>
@@ -4979,7 +4974,7 @@
           <p:nvPr/>
         </p:nvPicPr>
         <p:blipFill>
-          <a:blip r:embed="rId8" cstate="hqprint">
+          <a:blip r:embed="rId7" cstate="hqprint">
             <a:extLst>
               <a:ext uri="{28A0092B-C50C-407E-A947-70E740481C1C}">
                 <a14:useLocalDpi xmlns:a14="http://schemas.microsoft.com/office/drawing/2010/main" val="0"/>
@@ -5028,12 +5023,12 @@
           <a:graphicData uri="http://schemas.openxmlformats.org/presentationml/2006/ole">
             <mc:AlternateContent xmlns:mc="http://schemas.openxmlformats.org/markup-compatibility/2006">
               <mc:Choice xmlns:v="urn:schemas-microsoft-com:vml" Requires="v">
-                <p:oleObj spid="_x0000_s2071" name="Image" r:id="rId9" imgW="4926984" imgH="6171429" progId="Photoshop.Image.11">
+                <p:oleObj name="Image" r:id="rId8" imgW="4926984" imgH="6171429" progId="Photoshop.Image.11">
                   <p:embed/>
                 </p:oleObj>
               </mc:Choice>
               <mc:Fallback>
-                <p:oleObj name="Image" r:id="rId9" imgW="4926984" imgH="6171429" progId="Photoshop.Image.11">
+                <p:oleObj name="Image" r:id="rId8" imgW="4926984" imgH="6171429" progId="Photoshop.Image.11">
                   <p:embed/>
                   <p:pic>
                     <p:nvPicPr>
@@ -5050,7 +5045,7 @@
                       <p:nvPr/>
                     </p:nvPicPr>
                     <p:blipFill>
-                      <a:blip r:embed="rId6">
+                      <a:blip r:embed="rId5">
                         <a:extLst>
                           <a:ext uri="{28A0092B-C50C-407E-A947-70E740481C1C}">
                             <a14:useLocalDpi xmlns:a14="http://schemas.microsoft.com/office/drawing/2010/main" val="0"/>
@@ -5126,7 +5121,7 @@
           <p:nvPr/>
         </p:nvPicPr>
         <p:blipFill rotWithShape="1">
-          <a:blip r:embed="rId10">
+          <a:blip r:embed="rId9">
             <a:clrChange>
               <a:clrFrom>
                 <a:srgbClr val="FFFFFF"/>
@@ -5314,7 +5309,7 @@
           <p:nvPr/>
         </p:nvPicPr>
         <p:blipFill>
-          <a:blip r:embed="rId11"/>
+          <a:blip r:embed="rId10"/>
           <a:stretch>
             <a:fillRect/>
           </a:stretch>
@@ -5349,7 +5344,7 @@
           <p:nvPr/>
         </p:nvPicPr>
         <p:blipFill>
-          <a:blip r:embed="rId12"/>
+          <a:blip r:embed="rId11"/>
           <a:stretch>
             <a:fillRect/>
           </a:stretch>
@@ -5425,7 +5420,7 @@
           <p:nvPr/>
         </p:nvPicPr>
         <p:blipFill>
-          <a:blip r:embed="rId13" cstate="hqprint">
+          <a:blip r:embed="rId12" cstate="hqprint">
             <a:extLst>
               <a:ext uri="{28A0092B-C50C-407E-A947-70E740481C1C}">
                 <a14:useLocalDpi xmlns:a14="http://schemas.microsoft.com/office/drawing/2010/main" val="0"/>
@@ -5461,7 +5456,7 @@
           <p:nvPr/>
         </p:nvPicPr>
         <p:blipFill>
-          <a:blip r:embed="rId4"/>
+          <a:blip r:embed="rId3"/>
           <a:stretch>
             <a:fillRect/>
           </a:stretch>
@@ -5504,12 +5499,12 @@
           <a:graphicData uri="http://schemas.openxmlformats.org/presentationml/2006/ole">
             <mc:AlternateContent xmlns:mc="http://schemas.openxmlformats.org/markup-compatibility/2006">
               <mc:Choice xmlns:v="urn:schemas-microsoft-com:vml" Requires="v">
-                <p:oleObj spid="_x0000_s2072" name="Image" r:id="rId14" imgW="4926984" imgH="6171429" progId="Photoshop.Image.11">
+                <p:oleObj name="Image" r:id="rId4" imgW="4926984" imgH="6171429" progId="Photoshop.Image.11">
                   <p:embed/>
                 </p:oleObj>
               </mc:Choice>
               <mc:Fallback>
-                <p:oleObj name="Image" r:id="rId14" imgW="4926984" imgH="6171429" progId="Photoshop.Image.11">
+                <p:oleObj name="Image" r:id="rId4" imgW="4926984" imgH="6171429" progId="Photoshop.Image.11">
                   <p:embed/>
                   <p:pic>
                     <p:nvPicPr>
@@ -5526,7 +5521,7 @@
                       <p:nvPr/>
                     </p:nvPicPr>
                     <p:blipFill>
-                      <a:blip r:embed="rId6">
+                      <a:blip r:embed="rId5">
                         <a:extLst>
                           <a:ext uri="{28A0092B-C50C-407E-A947-70E740481C1C}">
                             <a14:useLocalDpi xmlns:a14="http://schemas.microsoft.com/office/drawing/2010/main" val="0"/>
@@ -5602,7 +5597,7 @@
           <p:nvPr/>
         </p:nvPicPr>
         <p:blipFill>
-          <a:blip r:embed="rId8" cstate="hqprint">
+          <a:blip r:embed="rId7" cstate="hqprint">
             <a:extLst>
               <a:ext uri="{28A0092B-C50C-407E-A947-70E740481C1C}">
                 <a14:useLocalDpi xmlns:a14="http://schemas.microsoft.com/office/drawing/2010/main" val="0"/>
@@ -5651,12 +5646,12 @@
           <a:graphicData uri="http://schemas.openxmlformats.org/presentationml/2006/ole">
             <mc:AlternateContent xmlns:mc="http://schemas.openxmlformats.org/markup-compatibility/2006">
               <mc:Choice xmlns:v="urn:schemas-microsoft-com:vml" Requires="v">
-                <p:oleObj spid="_x0000_s2073" name="Image" r:id="rId9" imgW="4926984" imgH="6171429" progId="Photoshop.Image.11">
+                <p:oleObj name="Image" r:id="rId8" imgW="4926984" imgH="6171429" progId="Photoshop.Image.11">
                   <p:embed/>
                 </p:oleObj>
               </mc:Choice>
               <mc:Fallback>
-                <p:oleObj name="Image" r:id="rId9" imgW="4926984" imgH="6171429" progId="Photoshop.Image.11">
+                <p:oleObj name="Image" r:id="rId8" imgW="4926984" imgH="6171429" progId="Photoshop.Image.11">
                   <p:embed/>
                   <p:pic>
                     <p:nvPicPr>
@@ -5673,7 +5668,7 @@
                       <p:nvPr/>
                     </p:nvPicPr>
                     <p:blipFill>
-                      <a:blip r:embed="rId6">
+                      <a:blip r:embed="rId5">
                         <a:extLst>
                           <a:ext uri="{28A0092B-C50C-407E-A947-70E740481C1C}">
                             <a14:useLocalDpi xmlns:a14="http://schemas.microsoft.com/office/drawing/2010/main" val="0"/>
@@ -5749,7 +5744,7 @@
           <p:nvPr/>
         </p:nvPicPr>
         <p:blipFill rotWithShape="1">
-          <a:blip r:embed="rId10">
+          <a:blip r:embed="rId9">
             <a:clrChange>
               <a:clrFrom>
                 <a:srgbClr val="FFFFFF"/>
@@ -5983,7 +5978,7 @@
           <p:nvPr/>
         </p:nvPicPr>
         <p:blipFill>
-          <a:blip r:embed="rId15">
+          <a:blip r:embed="rId13">
             <a:extLst>
               <a:ext uri="{28A0092B-C50C-407E-A947-70E740481C1C}">
                 <a14:useLocalDpi xmlns:a14="http://schemas.microsoft.com/office/drawing/2010/main" val="0"/>
@@ -6145,7 +6140,23 @@
                   <a:srgbClr val="0070C0"/>
                 </a:solidFill>
               </a:rPr>
-              <a:t> (paralel </a:t>
+              <a:t> (</a:t>
+            </a:r>
+            <a:r>
+              <a:rPr lang="pl-PL" sz="2800" dirty="0" err="1">
+                <a:solidFill>
+                  <a:srgbClr val="0070C0"/>
+                </a:solidFill>
+              </a:rPr>
+              <a:t>parallel</a:t>
+            </a:r>
+            <a:r>
+              <a:rPr lang="pl-PL" sz="2800" dirty="0">
+                <a:solidFill>
+                  <a:srgbClr val="0070C0"/>
+                </a:solidFill>
+              </a:rPr>
+              <a:t> </a:t>
             </a:r>
             <a:r>
               <a:rPr lang="pl-PL" sz="2800" dirty="0" err="1">
@@ -6927,7 +6938,7 @@
                   <a:srgbClr val="0070C0"/>
                 </a:solidFill>
               </a:rPr>
-              <a:t>Flexibile</a:t>
+              <a:t>Flexible</a:t>
             </a:r>
             <a:endParaRPr lang="pl-PL" sz="2800" dirty="0">
               <a:solidFill>
@@ -7021,7 +7032,7 @@
                   <a:srgbClr val="0070C0"/>
                 </a:solidFill>
               </a:rPr>
-              <a:t>habbits</a:t>
+              <a:t>habits</a:t>
             </a:r>
             <a:endParaRPr lang="pl-PL" sz="2800" dirty="0">
               <a:solidFill>
@@ -7325,21 +7336,8 @@
                   <a:srgbClr val="0070C0"/>
                 </a:solidFill>
               </a:rPr>
-              <a:t>We </a:t>
-            </a:r>
-            <a:r>
-              <a:rPr lang="pl-PL" sz="2800" dirty="0" smtClean="0">
-                <a:solidFill>
-                  <a:srgbClr val="0070C0"/>
-                </a:solidFill>
-              </a:rPr>
-              <a:t>recommend:</a:t>
-            </a:r>
-            <a:endParaRPr lang="pl-PL" sz="2800" dirty="0">
-              <a:solidFill>
-                <a:srgbClr val="0070C0"/>
-              </a:solidFill>
-            </a:endParaRPr>
+              <a:t>We recommend:</a:t>
+            </a:r>
           </a:p>
           <a:p>
             <a:pPr marL="457200" indent="-457200">
@@ -7347,20 +7345,12 @@
               <a:buChar char="•"/>
             </a:pPr>
             <a:r>
-              <a:rPr lang="en-GB" sz="2800" dirty="0" smtClean="0">
-                <a:solidFill>
-                  <a:srgbClr val="0070C0"/>
-                </a:solidFill>
-              </a:rPr>
-              <a:t>Firstly</a:t>
-            </a:r>
-            <a:r>
               <a:rPr lang="en-GB" sz="2800" dirty="0">
                 <a:solidFill>
                   <a:srgbClr val="0070C0"/>
                 </a:solidFill>
               </a:rPr>
-              <a:t>, learn how to make simple plots, clean/reorganize files and data tables</a:t>
+              <a:t>Firstly, learn how to make simple plots, clean/reorganise files and data tables</a:t>
             </a:r>
           </a:p>
           <a:p>
@@ -7369,20 +7359,12 @@
               <a:buChar char="•"/>
             </a:pPr>
             <a:r>
-              <a:rPr lang="en-GB" sz="2800" dirty="0" smtClean="0">
-                <a:solidFill>
-                  <a:srgbClr val="0070C0"/>
-                </a:solidFill>
-              </a:rPr>
-              <a:t>Secondly</a:t>
-            </a:r>
-            <a:r>
               <a:rPr lang="en-GB" sz="2800" dirty="0">
                 <a:solidFill>
                   <a:srgbClr val="0070C0"/>
                 </a:solidFill>
               </a:rPr>
-              <a:t>, learn basics of software engineering and good programming practices</a:t>
+              <a:t>Secondly, learn the basics of software engineering and good programming practices</a:t>
             </a:r>
           </a:p>
           <a:p>
@@ -7391,20 +7373,12 @@
               <a:buChar char="•"/>
             </a:pPr>
             <a:r>
-              <a:rPr lang="en-GB" sz="2800" dirty="0" smtClean="0">
-                <a:solidFill>
-                  <a:srgbClr val="0070C0"/>
-                </a:solidFill>
-              </a:rPr>
-              <a:t>Then </a:t>
-            </a:r>
-            <a:r>
               <a:rPr lang="en-GB" sz="2800" dirty="0">
                 <a:solidFill>
                   <a:srgbClr val="0070C0"/>
                 </a:solidFill>
               </a:rPr>
-              <a:t>start coding advanced analysis and processing, construct pipelines with workflows</a:t>
+              <a:t>Then start coding advanced analysis and processing, construct pipelines with workflows</a:t>
             </a:r>
             <a:endParaRPr lang="pl-PL" sz="2800" dirty="0">
               <a:solidFill>
@@ -9229,12 +9203,12 @@
           <a:graphicData uri="http://schemas.openxmlformats.org/presentationml/2006/ole">
             <mc:AlternateContent xmlns:mc="http://schemas.openxmlformats.org/markup-compatibility/2006">
               <mc:Choice xmlns:v="urn:schemas-microsoft-com:vml" Requires="v">
-                <p:oleObj spid="_x0000_s1036" name="Image" r:id="rId4" imgW="4926984" imgH="6171429" progId="Photoshop.Image.11">
+                <p:oleObj name="Image" r:id="rId3" imgW="4926984" imgH="6171429" progId="Photoshop.Image.11">
                   <p:embed/>
                 </p:oleObj>
               </mc:Choice>
               <mc:Fallback>
-                <p:oleObj name="Image" r:id="rId4" imgW="4926984" imgH="6171429" progId="Photoshop.Image.11">
+                <p:oleObj name="Image" r:id="rId3" imgW="4926984" imgH="6171429" progId="Photoshop.Image.11">
                   <p:embed/>
                   <p:pic>
                     <p:nvPicPr>
@@ -9251,7 +9225,7 @@
                       <p:nvPr/>
                     </p:nvPicPr>
                     <p:blipFill>
-                      <a:blip r:embed="rId5">
+                      <a:blip r:embed="rId4">
                         <a:extLst>
                           <a:ext uri="{28A0092B-C50C-407E-A947-70E740481C1C}">
                             <a14:useLocalDpi xmlns:a14="http://schemas.microsoft.com/office/drawing/2010/main" val="0"/>
@@ -9327,7 +9301,7 @@
           <p:nvPr/>
         </p:nvPicPr>
         <p:blipFill>
-          <a:blip r:embed="rId6" cstate="hqprint">
+          <a:blip r:embed="rId5" cstate="hqprint">
             <a:extLst>
               <a:ext uri="{28A0092B-C50C-407E-A947-70E740481C1C}">
                 <a14:useLocalDpi xmlns:a14="http://schemas.microsoft.com/office/drawing/2010/main" val="0"/>
@@ -9418,7 +9392,7 @@
           <p:nvPr/>
         </p:nvPicPr>
         <p:blipFill>
-          <a:blip r:embed="rId7" cstate="hqprint">
+          <a:blip r:embed="rId6" cstate="hqprint">
             <a:extLst>
               <a:ext uri="{28A0092B-C50C-407E-A947-70E740481C1C}">
                 <a14:useLocalDpi xmlns:a14="http://schemas.microsoft.com/office/drawing/2010/main" val="0"/>
@@ -9454,7 +9428,7 @@
           <p:nvPr/>
         </p:nvPicPr>
         <p:blipFill>
-          <a:blip r:embed="rId8" cstate="hqprint">
+          <a:blip r:embed="rId7" cstate="hqprint">
             <a:extLst>
               <a:ext uri="{28A0092B-C50C-407E-A947-70E740481C1C}">
                 <a14:useLocalDpi xmlns:a14="http://schemas.microsoft.com/office/drawing/2010/main" val="0"/>
@@ -9503,12 +9477,12 @@
           <a:graphicData uri="http://schemas.openxmlformats.org/presentationml/2006/ole">
             <mc:AlternateContent xmlns:mc="http://schemas.openxmlformats.org/markup-compatibility/2006">
               <mc:Choice xmlns:v="urn:schemas-microsoft-com:vml" Requires="v">
-                <p:oleObj spid="_x0000_s1037" name="Image" r:id="rId9" imgW="4926984" imgH="6171429" progId="Photoshop.Image.11">
+                <p:oleObj name="Image" r:id="rId8" imgW="4926984" imgH="6171429" progId="Photoshop.Image.11">
                   <p:embed/>
                 </p:oleObj>
               </mc:Choice>
               <mc:Fallback>
-                <p:oleObj name="Image" r:id="rId9" imgW="4926984" imgH="6171429" progId="Photoshop.Image.11">
+                <p:oleObj name="Image" r:id="rId8" imgW="4926984" imgH="6171429" progId="Photoshop.Image.11">
                   <p:embed/>
                   <p:pic>
                     <p:nvPicPr>
@@ -9519,7 +9493,7 @@
                       <p:nvPr/>
                     </p:nvPicPr>
                     <p:blipFill>
-                      <a:blip r:embed="rId5">
+                      <a:blip r:embed="rId4">
                         <a:extLst>
                           <a:ext uri="{28A0092B-C50C-407E-A947-70E740481C1C}">
                             <a14:useLocalDpi xmlns:a14="http://schemas.microsoft.com/office/drawing/2010/main" val="0"/>
@@ -9595,7 +9569,7 @@
           <p:nvPr/>
         </p:nvPicPr>
         <p:blipFill>
-          <a:blip r:embed="rId10" cstate="print">
+          <a:blip r:embed="rId9" cstate="print">
             <a:extLst>
               <a:ext uri="{28A0092B-C50C-407E-A947-70E740481C1C}">
                 <a14:useLocalDpi xmlns:a14="http://schemas.microsoft.com/office/drawing/2010/main" val="0"/>
@@ -9631,7 +9605,7 @@
           <p:nvPr/>
         </p:nvPicPr>
         <p:blipFill rotWithShape="1">
-          <a:blip r:embed="rId11">
+          <a:blip r:embed="rId10">
             <a:clrChange>
               <a:clrFrom>
                 <a:srgbClr val="FFFFFF"/>
@@ -10079,7 +10053,7 @@
           <p:nvPr/>
         </p:nvPicPr>
         <p:blipFill rotWithShape="1">
-          <a:blip r:embed="rId11">
+          <a:blip r:embed="rId10">
             <a:clrChange>
               <a:clrFrom>
                 <a:srgbClr val="FFFFFF"/>
@@ -10120,7 +10094,7 @@
           <p:nvPr/>
         </p:nvPicPr>
         <p:blipFill rotWithShape="1">
-          <a:blip r:embed="rId11">
+          <a:blip r:embed="rId10">
             <a:clrChange>
               <a:clrFrom>
                 <a:srgbClr val="FFFFFF"/>
@@ -10161,7 +10135,7 @@
           <p:nvPr/>
         </p:nvPicPr>
         <p:blipFill rotWithShape="1">
-          <a:blip r:embed="rId11">
+          <a:blip r:embed="rId10">
             <a:clrChange>
               <a:clrFrom>
                 <a:srgbClr val="FFFFFF"/>
@@ -10248,7 +10222,7 @@
           <p:nvPr/>
         </p:nvPicPr>
         <p:blipFill>
-          <a:blip r:embed="rId12"/>
+          <a:blip r:embed="rId11"/>
           <a:stretch>
             <a:fillRect/>
           </a:stretch>
@@ -10278,7 +10252,7 @@
           <p:nvPr/>
         </p:nvPicPr>
         <p:blipFill>
-          <a:blip r:embed="rId13"/>
+          <a:blip r:embed="rId12"/>
           <a:stretch>
             <a:fillRect/>
           </a:stretch>
@@ -10313,7 +10287,7 @@
           <p:nvPr/>
         </p:nvPicPr>
         <p:blipFill>
-          <a:blip r:embed="rId14"/>
+          <a:blip r:embed="rId13"/>
           <a:stretch>
             <a:fillRect/>
           </a:stretch>
@@ -10684,7 +10658,7 @@
               <a:buChar char="•"/>
             </a:pPr>
             <a:r>
-              <a:rPr lang="en-GB" sz="2800" dirty="0" err="1" smtClean="0">
+              <a:rPr lang="en-GB" sz="2800" dirty="0" err="1">
                 <a:solidFill>
                   <a:srgbClr val="0070C0"/>
                 </a:solidFill>
@@ -10692,20 +10666,12 @@
               <a:t>Jupyter</a:t>
             </a:r>
             <a:r>
-              <a:rPr lang="en-GB" sz="2800" dirty="0" smtClean="0">
-                <a:solidFill>
-                  <a:srgbClr val="0070C0"/>
-                </a:solidFill>
-              </a:rPr>
-              <a:t> </a:t>
-            </a:r>
-            <a:r>
               <a:rPr lang="en-GB" sz="2800" dirty="0">
                 <a:solidFill>
                   <a:srgbClr val="0070C0"/>
                 </a:solidFill>
               </a:rPr>
-              <a:t>Notebooks are useful tools to share analysis with non-programmers</a:t>
+              <a:t> Notebooks are useful tools for sharing analysis with non-programmers.</a:t>
             </a:r>
           </a:p>
           <a:p>
@@ -10725,20 +10691,12 @@
               <a:buChar char="•"/>
             </a:pPr>
             <a:r>
-              <a:rPr lang="en-GB" sz="2800" dirty="0" smtClean="0">
-                <a:solidFill>
-                  <a:srgbClr val="0070C0"/>
-                </a:solidFill>
-              </a:rPr>
-              <a:t>One </a:t>
-            </a:r>
-            <a:r>
               <a:rPr lang="en-GB" sz="2800" dirty="0">
                 <a:solidFill>
                   <a:srgbClr val="0070C0"/>
                 </a:solidFill>
               </a:rPr>
-              <a:t>single document can visualise background, results, formulae/code and metadata</a:t>
+              <a:t>One single document can visualise background, results, formulae/code and metadata.</a:t>
             </a:r>
           </a:p>
           <a:p>
@@ -10758,20 +10716,12 @@
               <a:buChar char="•"/>
             </a:pPr>
             <a:r>
-              <a:rPr lang="en-GB" sz="2800" dirty="0" smtClean="0">
-                <a:solidFill>
-                  <a:srgbClr val="0070C0"/>
-                </a:solidFill>
-              </a:rPr>
-              <a:t>One </a:t>
-            </a:r>
-            <a:r>
               <a:rPr lang="en-GB" sz="2800" dirty="0">
                 <a:solidFill>
                   <a:srgbClr val="0070C0"/>
                 </a:solidFill>
               </a:rPr>
-              <a:t>single document helps to make your work more understandable, repeatable and shareable</a:t>
+              <a:t>One single document helps to make your work more understandable, repeatable and shareable.</a:t>
             </a:r>
           </a:p>
         </p:txBody>
@@ -11062,31 +11012,7 @@
                   <a:srgbClr val="0070C0"/>
                 </a:solidFill>
               </a:rPr>
-              <a:t>(</a:t>
-            </a:r>
-            <a:r>
-              <a:rPr lang="pl-PL" sz="2800" dirty="0" smtClean="0">
-                <a:solidFill>
-                  <a:srgbClr val="0070C0"/>
-                </a:solidFill>
-              </a:rPr>
-              <a:t>retries, adjustments, modifications </a:t>
-            </a:r>
-            <a:r>
-              <a:rPr lang="pl-PL" sz="2800" dirty="0">
-                <a:solidFill>
-                  <a:srgbClr val="0070C0"/>
-                </a:solidFill>
-              </a:rPr>
-              <a:t>to exp </a:t>
-            </a:r>
-            <a:r>
-              <a:rPr lang="pl-PL" sz="2800" dirty="0" smtClean="0">
-                <a:solidFill>
-                  <a:srgbClr val="0070C0"/>
-                </a:solidFill>
-              </a:rPr>
-              <a:t>procedures)</a:t>
+              <a:t>(retries, adjustments, modifications to exp procedures)</a:t>
             </a:r>
             <a:endParaRPr lang="en-GB" sz="2800" dirty="0">
               <a:solidFill>
@@ -11105,15 +11031,7 @@
                   <a:srgbClr val="0070C0"/>
                 </a:solidFill>
               </a:rPr>
-              <a:t>data </a:t>
-            </a:r>
-            <a:r>
-              <a:rPr lang="pl-PL" sz="2800" dirty="0" smtClean="0">
-                <a:solidFill>
-                  <a:srgbClr val="0070C0"/>
-                </a:solidFill>
-              </a:rPr>
-              <a:t>exploration </a:t>
+              <a:t>data exploration </a:t>
             </a:r>
             <a:endParaRPr lang="en-GB" sz="2800" dirty="0">
               <a:solidFill>
@@ -11132,15 +11050,7 @@
                   <a:srgbClr val="0070C0"/>
                 </a:solidFill>
               </a:rPr>
-              <a:t>selection of analysis methods and </a:t>
-            </a:r>
-            <a:r>
-              <a:rPr lang="pl-PL" sz="2800" dirty="0" smtClean="0">
-                <a:solidFill>
-                  <a:srgbClr val="0070C0"/>
-                </a:solidFill>
-              </a:rPr>
-              <a:t>parameters</a:t>
+              <a:t>selection of analysis methods and parameters</a:t>
             </a:r>
             <a:endParaRPr lang="en-GB" sz="2800" dirty="0">
               <a:solidFill>
@@ -11159,31 +11069,7 @@
                   <a:srgbClr val="0070C0"/>
                 </a:solidFill>
               </a:rPr>
-              <a:t>(</a:t>
-            </a:r>
-            <a:r>
-              <a:rPr lang="pl-PL" sz="2800" dirty="0" smtClean="0">
-                <a:solidFill>
-                  <a:srgbClr val="0070C0"/>
-                </a:solidFill>
-              </a:rPr>
-              <a:t>statistical) validation </a:t>
-            </a:r>
-            <a:r>
-              <a:rPr lang="pl-PL" sz="2800" dirty="0">
-                <a:solidFill>
-                  <a:srgbClr val="0070C0"/>
-                </a:solidFill>
-              </a:rPr>
-              <a:t>of </a:t>
-            </a:r>
-            <a:r>
-              <a:rPr lang="pl-PL" sz="2800" dirty="0" smtClean="0">
-                <a:solidFill>
-                  <a:srgbClr val="0070C0"/>
-                </a:solidFill>
-              </a:rPr>
-              <a:t>results </a:t>
+              <a:t>(statistical) validation of results </a:t>
             </a:r>
             <a:endParaRPr lang="en-GB" sz="2800" dirty="0">
               <a:solidFill>
@@ -11197,20 +11083,28 @@
               <a:buChar char="•"/>
             </a:pPr>
             <a:r>
-              <a:rPr lang="pl-PL" sz="2800" dirty="0" smtClean="0">
-                <a:solidFill>
-                  <a:srgbClr val="0070C0"/>
-                </a:solidFill>
-              </a:rPr>
-              <a:t>final  </a:t>
-            </a:r>
-            <a:r>
-              <a:rPr lang="pl-PL" sz="2800" dirty="0">
-                <a:solidFill>
-                  <a:srgbClr val="0070C0"/>
-                </a:solidFill>
-              </a:rPr>
-              <a:t>version of results and graphical rendering</a:t>
+              <a:rPr lang="pl-PL" sz="2800" dirty="0">
+                <a:solidFill>
+                  <a:srgbClr val="0070C0"/>
+                </a:solidFill>
+              </a:rPr>
+              <a:t>the </a:t>
+            </a:r>
+            <a:r>
+              <a:rPr lang="pl-PL" sz="2800" dirty="0" err="1">
+                <a:solidFill>
+                  <a:srgbClr val="0070C0"/>
+                </a:solidFill>
+              </a:rPr>
+              <a:t>final</a:t>
+            </a:r>
+            <a:r>
+              <a:rPr lang="pl-PL" sz="2800" dirty="0">
+                <a:solidFill>
+                  <a:srgbClr val="0070C0"/>
+                </a:solidFill>
+              </a:rPr>
+              <a:t> version of results and graphical rendering</a:t>
             </a:r>
             <a:endParaRPr lang="en-GB" sz="2800" dirty="0">
               <a:solidFill>
@@ -11381,28 +11275,12 @@
           <a:lstStyle/>
           <a:p>
             <a:r>
-              <a:rPr lang="pl-PL" sz="2800" dirty="0" smtClean="0">
-                <a:solidFill>
-                  <a:srgbClr val="0070C0"/>
-                </a:solidFill>
-              </a:rPr>
-              <a:t>Jupyter </a:t>
-            </a:r>
-            <a:r>
-              <a:rPr lang="pl-PL" sz="2800" dirty="0">
-                <a:solidFill>
-                  <a:srgbClr val="0070C0"/>
-                </a:solidFill>
-              </a:rPr>
-              <a:t>notebook </a:t>
-            </a:r>
-            <a:r>
-              <a:rPr lang="pl-PL" sz="2800" dirty="0" smtClean="0">
-                <a:solidFill>
-                  <a:srgbClr val="0070C0"/>
-                </a:solidFill>
-              </a:rPr>
-              <a:t>example</a:t>
+              <a:rPr lang="pl-PL" sz="2800" dirty="0">
+                <a:solidFill>
+                  <a:srgbClr val="0070C0"/>
+                </a:solidFill>
+              </a:rPr>
+              <a:t>Jupyter notebook example</a:t>
             </a:r>
             <a:endParaRPr lang="en-GB" sz="2800" dirty="0">
               <a:solidFill>
@@ -11577,7 +11455,7 @@
               <a:buChar char="•"/>
             </a:pPr>
             <a:r>
-              <a:rPr lang="en-GB" sz="2800" dirty="0" smtClean="0">
+              <a:rPr lang="en-GB" sz="2800" dirty="0">
                 <a:solidFill>
                   <a:srgbClr val="0070C0"/>
                 </a:solidFill>
@@ -11590,7 +11468,7 @@
               <a:buFont typeface="Arial" panose="020B0604020202020204" pitchFamily="34" charset="0"/>
               <a:buChar char="•"/>
             </a:pPr>
-            <a:endParaRPr lang="en-GB" sz="2800" dirty="0" smtClean="0">
+            <a:endParaRPr lang="en-GB" sz="2800" dirty="0">
               <a:solidFill>
                 <a:srgbClr val="0070C0"/>
               </a:solidFill>
@@ -11602,12 +11480,12 @@
               <a:buChar char="•"/>
             </a:pPr>
             <a:r>
-              <a:rPr lang="en-GB" sz="2800" dirty="0" smtClean="0">
-                <a:solidFill>
-                  <a:srgbClr val="0070C0"/>
-                </a:solidFill>
-              </a:rPr>
-              <a:t>More „powerful” / „professional” scientific plots than ones available in Excel</a:t>
+              <a:rPr lang="en-GB" sz="2800" dirty="0">
+                <a:solidFill>
+                  <a:srgbClr val="0070C0"/>
+                </a:solidFill>
+              </a:rPr>
+              <a:t>More „powerful” / „professional” scientific plots than the ones available in Excel</a:t>
             </a:r>
           </a:p>
           <a:p>
@@ -11615,7 +11493,7 @@
               <a:buFont typeface="Arial" panose="020B0604020202020204" pitchFamily="34" charset="0"/>
               <a:buChar char="•"/>
             </a:pPr>
-            <a:endParaRPr lang="en-GB" sz="2800" dirty="0" smtClean="0">
+            <a:endParaRPr lang="en-GB" sz="2800" dirty="0">
               <a:solidFill>
                 <a:srgbClr val="0070C0"/>
               </a:solidFill>
@@ -11627,7 +11505,7 @@
               <a:buChar char="•"/>
             </a:pPr>
             <a:r>
-              <a:rPr lang="en-GB" sz="2800" dirty="0" smtClean="0">
+              <a:rPr lang="en-GB" sz="2800" dirty="0">
                 <a:solidFill>
                   <a:srgbClr val="0070C0"/>
                 </a:solidFill>
@@ -11640,7 +11518,7 @@
               <a:buFont typeface="Arial" panose="020B0604020202020204" pitchFamily="34" charset="0"/>
               <a:buChar char="•"/>
             </a:pPr>
-            <a:endParaRPr lang="en-GB" sz="2800" dirty="0" smtClean="0">
+            <a:endParaRPr lang="en-GB" sz="2800" dirty="0">
               <a:solidFill>
                 <a:srgbClr val="0070C0"/>
               </a:solidFill>
@@ -11652,7 +11530,7 @@
               <a:buChar char="•"/>
             </a:pPr>
             <a:r>
-              <a:rPr lang="en-GB" sz="2800" dirty="0" smtClean="0">
+              <a:rPr lang="en-GB" sz="2800" dirty="0">
                 <a:solidFill>
                   <a:srgbClr val="0070C0"/>
                 </a:solidFill>
@@ -11660,7 +11538,7 @@
               <a:t>Easier to adjust for specific dimensions/formats/style</a:t>
             </a:r>
             <a:r>
-              <a:rPr lang="pl-PL" sz="2800" dirty="0" smtClean="0">
+              <a:rPr lang="pl-PL" sz="2800" dirty="0">
                 <a:solidFill>
                   <a:srgbClr val="0070C0"/>
                 </a:solidFill>
@@ -11762,18 +11640,13 @@
           <a:lstStyle/>
           <a:p>
             <a:r>
-              <a:rPr lang="en-GB" dirty="0" smtClean="0">
+              <a:rPr lang="en-GB" dirty="0">
                 <a:solidFill>
                   <a:srgbClr val="0070C0"/>
                 </a:solidFill>
               </a:rPr>
               <a:t>Plotting in R (Python)</a:t>
             </a:r>
-            <a:endParaRPr lang="en-GB" dirty="0">
-              <a:solidFill>
-                <a:srgbClr val="0070C0"/>
-              </a:solidFill>
-            </a:endParaRPr>
           </a:p>
         </p:txBody>
       </p:sp>
@@ -12010,20 +11883,12 @@
               <a:buChar char="•"/>
             </a:pPr>
             <a:r>
-              <a:rPr lang="pl-PL" sz="2800" dirty="0" smtClean="0">
-                <a:solidFill>
-                  <a:srgbClr val="0070C0"/>
-                </a:solidFill>
-              </a:rPr>
-              <a:t>Intermediate </a:t>
-            </a:r>
-            <a:r>
-              <a:rPr lang="pl-PL" sz="2800" dirty="0">
-                <a:solidFill>
-                  <a:srgbClr val="0070C0"/>
-                </a:solidFill>
-              </a:rPr>
-              <a:t>reusults, adjustments, steps….</a:t>
+              <a:rPr lang="pl-PL" sz="2800" dirty="0">
+                <a:solidFill>
+                  <a:srgbClr val="0070C0"/>
+                </a:solidFill>
+              </a:rPr>
+              <a:t>Intermediate reusults, adjustments, steps….</a:t>
             </a:r>
           </a:p>
           <a:p>
@@ -12158,15 +12023,7 @@
                   <a:srgbClr val="0070C0"/>
                 </a:solidFill>
               </a:rPr>
-              <a:t>Reusable ad-hoc analysis with </a:t>
-            </a:r>
-            <a:r>
-              <a:rPr lang="pl-PL" dirty="0" smtClean="0">
-                <a:solidFill>
-                  <a:srgbClr val="0070C0"/>
-                </a:solidFill>
-              </a:rPr>
-              <a:t>jupyter</a:t>
+              <a:t>Reusable ad-hoc analysis with jupyter</a:t>
             </a:r>
             <a:endParaRPr lang="en-GB" dirty="0">
               <a:solidFill>
@@ -12296,23 +12153,7 @@
                   <a:srgbClr val="0070C0"/>
                 </a:solidFill>
               </a:rPr>
-              <a:t>self</a:t>
-            </a:r>
-            <a:r>
-              <a:rPr lang="pl-PL" sz="2800" dirty="0">
-                <a:solidFill>
-                  <a:srgbClr val="0070C0"/>
-                </a:solidFill>
-              </a:rPr>
-              <a:t> </a:t>
-            </a:r>
-            <a:r>
-              <a:rPr lang="pl-PL" sz="2800" dirty="0" err="1">
-                <a:solidFill>
-                  <a:srgbClr val="0070C0"/>
-                </a:solidFill>
-              </a:rPr>
-              <a:t>discipline</a:t>
+              <a:t>self-discipline</a:t>
             </a:r>
             <a:endParaRPr lang="pl-PL" sz="2800" dirty="0">
               <a:solidFill>
@@ -12354,7 +12195,7 @@
                   <a:srgbClr val="0070C0"/>
                 </a:solidFill>
               </a:rPr>
-              <a:t>decission</a:t>
+              <a:t>decision</a:t>
             </a:r>
             <a:r>
               <a:rPr lang="pl-PL" sz="2800" dirty="0">
@@ -12698,14 +12539,6 @@
               </a:rPr>
               <a:t>functions</a:t>
             </a:r>
-            <a:r>
-              <a:rPr lang="pl-PL" sz="2800" dirty="0">
-                <a:solidFill>
-                  <a:srgbClr val="0070C0"/>
-                </a:solidFill>
-              </a:rPr>
-              <a:t/>
-            </a:r>
             <a:br>
               <a:rPr lang="pl-PL" sz="2800" dirty="0">
                 <a:solidFill>
@@ -12743,7 +12576,7 @@
                   <a:srgbClr val="0070C0"/>
                 </a:solidFill>
               </a:rPr>
-              <a:t>intentations</a:t>
+              <a:t>indentations</a:t>
             </a:r>
             <a:r>
               <a:rPr lang="pl-PL" sz="2800" dirty="0">
@@ -12816,25 +12649,21 @@
             </a:endParaRPr>
           </a:p>
           <a:p>
-            <a:pPr marL="457200" indent="-457200">
-              <a:buFont typeface="Arial" panose="020B0604020202020204" pitchFamily="34" charset="0"/>
-              <a:buChar char="•"/>
-            </a:pPr>
-            <a:r>
-              <a:rPr lang="pl-PL" sz="2800" dirty="0">
-                <a:solidFill>
-                  <a:srgbClr val="0070C0"/>
-                </a:solidFill>
-              </a:rPr>
-              <a:t>- </a:t>
-            </a:r>
-            <a:r>
-              <a:rPr lang="pl-PL" sz="2800" dirty="0" err="1">
-                <a:solidFill>
-                  <a:srgbClr val="0070C0"/>
-                </a:solidFill>
-              </a:rPr>
-              <a:t>modularization</a:t>
+            <a:r>
+              <a:rPr lang="pl-PL" sz="2800" dirty="0">
+                <a:solidFill>
+                  <a:srgbClr val="0070C0"/>
+                </a:solidFill>
+              </a:rPr>
+              <a:t>     - </a:t>
+            </a:r>
+            <a:r>
+              <a:rPr lang="pl-PL" sz="2800" dirty="0" err="1">
+                <a:solidFill>
+                  <a:srgbClr val="0070C0"/>
+                </a:solidFill>
+              </a:rPr>
+              <a:t>modularisation</a:t>
             </a:r>
             <a:endParaRPr lang="pl-PL" sz="2800" dirty="0">
               <a:solidFill>
@@ -13109,23 +12938,7 @@
                   <a:srgbClr val="0070C0"/>
                 </a:solidFill>
               </a:rPr>
-              <a:t>self</a:t>
-            </a:r>
-            <a:r>
-              <a:rPr lang="pl-PL" sz="2800" dirty="0">
-                <a:solidFill>
-                  <a:srgbClr val="0070C0"/>
-                </a:solidFill>
-              </a:rPr>
-              <a:t> </a:t>
-            </a:r>
-            <a:r>
-              <a:rPr lang="pl-PL" sz="2800" dirty="0" err="1">
-                <a:solidFill>
-                  <a:srgbClr val="0070C0"/>
-                </a:solidFill>
-              </a:rPr>
-              <a:t>discipline</a:t>
+              <a:t>self-discipline</a:t>
             </a:r>
             <a:endParaRPr lang="pl-PL" sz="2800" dirty="0">
               <a:solidFill>
@@ -13151,7 +12964,39 @@
                   <a:srgbClr val="0070C0"/>
                 </a:solidFill>
               </a:rPr>
-              <a:t>Notebook has to be shipped with all file inputs and description of runtime environment</a:t>
+              <a:t>The notebook has to be shipped with all file inputs and a </a:t>
+            </a:r>
+            <a:r>
+              <a:rPr lang="pl-PL" sz="2800" dirty="0" err="1">
+                <a:solidFill>
+                  <a:srgbClr val="0070C0"/>
+                </a:solidFill>
+              </a:rPr>
+              <a:t>description</a:t>
+            </a:r>
+            <a:r>
+              <a:rPr lang="pl-PL" sz="2800" dirty="0">
+                <a:solidFill>
+                  <a:srgbClr val="0070C0"/>
+                </a:solidFill>
+              </a:rPr>
+              <a:t> of the </a:t>
+            </a:r>
+            <a:r>
+              <a:rPr lang="pl-PL" sz="2800" dirty="0" err="1">
+                <a:solidFill>
+                  <a:srgbClr val="0070C0"/>
+                </a:solidFill>
+              </a:rPr>
+              <a:t>runtime</a:t>
+            </a:r>
+            <a:r>
+              <a:rPr lang="pl-PL" sz="2800" dirty="0">
+                <a:solidFill>
+                  <a:srgbClr val="0070C0"/>
+                </a:solidFill>
+              </a:rPr>
+              <a:t> environment</a:t>
             </a:r>
             <a:endParaRPr lang="en-GB" sz="2800" dirty="0">
               <a:solidFill>
@@ -13354,7 +13199,7 @@
           <a:lstStyle/>
           <a:p>
             <a:r>
-              <a:rPr lang="en-GB" sz="2800" dirty="0" smtClean="0">
+              <a:rPr lang="en-GB" sz="2800" dirty="0">
                 <a:solidFill>
                   <a:srgbClr val="0070C0"/>
                 </a:solidFill>
@@ -13368,7 +13213,7 @@
               <a:buChar char="•"/>
             </a:pPr>
             <a:r>
-              <a:rPr lang="en-GB" sz="2800" dirty="0" smtClean="0">
+              <a:rPr lang="en-GB" sz="2800" dirty="0">
                 <a:solidFill>
                   <a:srgbClr val="0070C0"/>
                 </a:solidFill>
@@ -13382,7 +13227,7 @@
               <a:buChar char="•"/>
             </a:pPr>
             <a:r>
-              <a:rPr lang="en-GB" sz="2800" dirty="0" smtClean="0">
+              <a:rPr lang="en-GB" sz="2800" dirty="0">
                 <a:solidFill>
                   <a:srgbClr val="0070C0"/>
                 </a:solidFill>
@@ -13396,7 +13241,7 @@
               <a:buChar char="•"/>
             </a:pPr>
             <a:r>
-              <a:rPr lang="en-GB" sz="2800" dirty="0" smtClean="0">
+              <a:rPr lang="en-GB" sz="2800" dirty="0">
                 <a:solidFill>
                   <a:srgbClr val="0070C0"/>
                 </a:solidFill>
@@ -13410,7 +13255,7 @@
               <a:buChar char="•"/>
             </a:pPr>
             <a:r>
-              <a:rPr lang="en-GB" sz="2800" dirty="0" smtClean="0">
+              <a:rPr lang="en-GB" sz="2800" dirty="0">
                 <a:solidFill>
                   <a:srgbClr val="0070C0"/>
                 </a:solidFill>
@@ -13525,7 +13370,7 @@
           <a:lstStyle/>
           <a:p>
             <a:r>
-              <a:rPr lang="en-GB" dirty="0" smtClean="0">
+              <a:rPr lang="en-GB" dirty="0">
                 <a:solidFill>
                   <a:srgbClr val="0070C0"/>
                 </a:solidFill>
@@ -13533,12 +13378,12 @@
               <a:t>Reusable ad-hoc analysis with </a:t>
             </a:r>
             <a:r>
-              <a:rPr lang="en-GB" dirty="0" err="1" smtClean="0">
-                <a:solidFill>
-                  <a:srgbClr val="0070C0"/>
-                </a:solidFill>
-              </a:rPr>
-              <a:t>jupyter</a:t>
+              <a:rPr lang="en-GB" dirty="0" err="1">
+                <a:solidFill>
+                  <a:srgbClr val="0070C0"/>
+                </a:solidFill>
+              </a:rPr>
+              <a:t>Jupyter</a:t>
             </a:r>
             <a:endParaRPr lang="en-GB" dirty="0">
               <a:solidFill>
